--- a/monsters/Eveluion.pptx
+++ b/monsters/Eveluion.pptx
@@ -140,6 +140,114 @@
 </inkml:ink>
 </file>
 
+<file path=ppt/ink/ink10.xml><?xml version="1.0" encoding="utf-8"?>
+<inkml:ink xmlns:inkml="http://www.w3.org/2003/InkML">
+  <inkml:definitions>
+    <inkml:context xml:id="ctx0">
+      <inkml:inkSource xml:id="inkSrc0">
+        <inkml:traceFormat>
+          <inkml:channel name="X" type="integer" min="-2.14748E9" max="2.14748E9" units="cm"/>
+          <inkml:channel name="Y" type="integer" min="-2.14748E9" max="2.14748E9" units="cm"/>
+          <inkml:channel name="F" type="integer" max="32767" units="dev"/>
+        </inkml:traceFormat>
+        <inkml:channelProperties>
+          <inkml:channelProperty channel="X" name="resolution" value="1000" units="1/cm"/>
+          <inkml:channelProperty channel="Y" name="resolution" value="1000" units="1/cm"/>
+          <inkml:channelProperty channel="F" name="resolution" value="0" units="1/dev"/>
+        </inkml:channelProperties>
+      </inkml:inkSource>
+      <inkml:timestamp xml:id="ts0" timeString="2026-10-26T16:47:58.149"/>
+    </inkml:context>
+    <inkml:brush xml:id="br0">
+      <inkml:brushProperty name="width" value="0.035" units="cm"/>
+      <inkml:brushProperty name="height" value="0.035" units="cm"/>
+    </inkml:brush>
+  </inkml:definitions>
+  <inkml:trace contextRef="#ctx0" brushRef="#br0">0 0 24575,'63'4'0,"0"2"0,108 26 0,-99-17 0,22 7 0,-63-13 0,0-1 0,1-2 0,0-2 0,38 2 0,82-8-1365,-141 2-5461</inkml:trace>
+</inkml:ink>
+</file>
+
+<file path=ppt/ink/ink11.xml><?xml version="1.0" encoding="utf-8"?>
+<inkml:ink xmlns:inkml="http://www.w3.org/2003/InkML">
+  <inkml:definitions>
+    <inkml:context xml:id="ctx0">
+      <inkml:inkSource xml:id="inkSrc0">
+        <inkml:traceFormat>
+          <inkml:channel name="X" type="integer" min="-2.14748E9" max="2.14748E9" units="cm"/>
+          <inkml:channel name="Y" type="integer" min="-2.14748E9" max="2.14748E9" units="cm"/>
+          <inkml:channel name="F" type="integer" max="32767" units="dev"/>
+        </inkml:traceFormat>
+        <inkml:channelProperties>
+          <inkml:channelProperty channel="X" name="resolution" value="1000" units="1/cm"/>
+          <inkml:channelProperty channel="Y" name="resolution" value="1000" units="1/cm"/>
+          <inkml:channelProperty channel="F" name="resolution" value="0" units="1/dev"/>
+        </inkml:channelProperties>
+      </inkml:inkSource>
+      <inkml:timestamp xml:id="ts0" timeString="2026-10-26T16:47:58.954"/>
+    </inkml:context>
+    <inkml:brush xml:id="br0">
+      <inkml:brushProperty name="width" value="0.035" units="cm"/>
+      <inkml:brushProperty name="height" value="0.035" units="cm"/>
+    </inkml:brush>
+  </inkml:definitions>
+  <inkml:trace contextRef="#ctx0" brushRef="#br0">268 0 24575,'-2'44'0,"-2"-1"0,-11 48 0,3-20 0,-10 36 0,-39 120 0,49-186 0,4-16 0,-1-1 0,-1-1 0,-2 0 0,0 0 0,-1-1 0,-1-1 0,-25 31 0,26-40-1365,3-6-5461</inkml:trace>
+</inkml:ink>
+</file>
+
+<file path=ppt/ink/ink12.xml><?xml version="1.0" encoding="utf-8"?>
+<inkml:ink xmlns:inkml="http://www.w3.org/2003/InkML">
+  <inkml:definitions>
+    <inkml:context xml:id="ctx0">
+      <inkml:inkSource xml:id="inkSrc0">
+        <inkml:traceFormat>
+          <inkml:channel name="X" type="integer" min="-2.14748E9" max="2.14748E9" units="cm"/>
+          <inkml:channel name="Y" type="integer" min="-2.14748E9" max="2.14748E9" units="cm"/>
+          <inkml:channel name="F" type="integer" max="32767" units="dev"/>
+        </inkml:traceFormat>
+        <inkml:channelProperties>
+          <inkml:channelProperty channel="X" name="resolution" value="1000" units="1/cm"/>
+          <inkml:channelProperty channel="Y" name="resolution" value="1000" units="1/cm"/>
+          <inkml:channelProperty channel="F" name="resolution" value="0" units="1/dev"/>
+        </inkml:channelProperties>
+      </inkml:inkSource>
+      <inkml:timestamp xml:id="ts0" timeString="2026-10-26T16:48:00.223"/>
+    </inkml:context>
+    <inkml:brush xml:id="br0">
+      <inkml:brushProperty name="width" value="0.035" units="cm"/>
+      <inkml:brushProperty name="height" value="0.035" units="cm"/>
+    </inkml:brush>
+  </inkml:definitions>
+  <inkml:trace contextRef="#ctx0" brushRef="#br0">0 1015 24575,'0'-1004'-1365,"0"994"-5461</inkml:trace>
+</inkml:ink>
+</file>
+
+<file path=ppt/ink/ink13.xml><?xml version="1.0" encoding="utf-8"?>
+<inkml:ink xmlns:inkml="http://www.w3.org/2003/InkML">
+  <inkml:definitions>
+    <inkml:context xml:id="ctx0">
+      <inkml:inkSource xml:id="inkSrc0">
+        <inkml:traceFormat>
+          <inkml:channel name="X" type="integer" min="-2.14748E9" max="2.14748E9" units="cm"/>
+          <inkml:channel name="Y" type="integer" min="-2.14748E9" max="2.14748E9" units="cm"/>
+          <inkml:channel name="F" type="integer" max="32767" units="dev"/>
+        </inkml:traceFormat>
+        <inkml:channelProperties>
+          <inkml:channelProperty channel="X" name="resolution" value="1000" units="1/cm"/>
+          <inkml:channelProperty channel="Y" name="resolution" value="1000" units="1/cm"/>
+          <inkml:channelProperty channel="F" name="resolution" value="0" units="1/dev"/>
+        </inkml:channelProperties>
+      </inkml:inkSource>
+      <inkml:timestamp xml:id="ts0" timeString="2026-10-26T16:48:01.310"/>
+    </inkml:context>
+    <inkml:brush xml:id="br0">
+      <inkml:brushProperty name="width" value="0.035" units="cm"/>
+      <inkml:brushProperty name="height" value="0.035" units="cm"/>
+    </inkml:brush>
+  </inkml:definitions>
+  <inkml:trace contextRef="#ctx0" brushRef="#br0">1978 0 24575,'-18'0'0,"-44"0"0,-48 0 0,-38 0 0,-26 5 0,-21 1 0,-1 0-845,11-1 845,8-2 0,16-1 0,25-1 0,28 0 208,22-1-208,17 0 0,15-1 0,12 1 0,9 0 0,10 0-7554</inkml:trace>
+</inkml:ink>
+</file>
+
 <file path=ppt/ink/ink2.xml><?xml version="1.0" encoding="utf-8"?>
 <inkml:ink xmlns:inkml="http://www.w3.org/2003/InkML">
   <inkml:definitions>
@@ -237,6 +345,87 @@
           <inkml:channelProperty channel="F" name="resolution" value="0" units="1/dev"/>
         </inkml:channelProperties>
       </inkml:inkSource>
+      <inkml:timestamp xml:id="ts0" timeString="2026-10-26T16:47:47.237"/>
+    </inkml:context>
+    <inkml:brush xml:id="br0">
+      <inkml:brushProperty name="width" value="0.035" units="cm"/>
+      <inkml:brushProperty name="height" value="0.035" units="cm"/>
+    </inkml:brush>
+  </inkml:definitions>
+  <inkml:trace contextRef="#ctx0" brushRef="#br0">1 822 24575,'29'-3'0,"0"0"0,0-2 0,0-1 0,45-16 0,-42 12 0,279-84 0,130-38 0,-406 122 0,107-35 0,116-61 0,-99 33 0,-80 36 0,78-52 0,-4 3 0,-138 81 0,0 0 0,1 1 0,0 1 0,-1 1 0,1 0 0,0 0 0,0 2 0,24 2 0,-18-1 0,1-1 0,0-2 0,27-4 0,163-28 0,-175 31-50,-32 3-60,1 0 1,0-1-1,0 1 1,0-1-1,0-1 0,-1 1 1,1-1-1,-1 0 1,1-1-1,-1 1 1,10-7-1,-4-3-6716</inkml:trace>
+</inkml:ink>
+</file>
+
+<file path=ppt/ink/ink6.xml><?xml version="1.0" encoding="utf-8"?>
+<inkml:ink xmlns:inkml="http://www.w3.org/2003/InkML">
+  <inkml:definitions>
+    <inkml:context xml:id="ctx0">
+      <inkml:inkSource xml:id="inkSrc0">
+        <inkml:traceFormat>
+          <inkml:channel name="X" type="integer" min="-2.14748E9" max="2.14748E9" units="cm"/>
+          <inkml:channel name="Y" type="integer" min="-2.14748E9" max="2.14748E9" units="cm"/>
+          <inkml:channel name="F" type="integer" max="32767" units="dev"/>
+        </inkml:traceFormat>
+        <inkml:channelProperties>
+          <inkml:channelProperty channel="X" name="resolution" value="1000" units="1/cm"/>
+          <inkml:channelProperty channel="Y" name="resolution" value="1000" units="1/cm"/>
+          <inkml:channelProperty channel="F" name="resolution" value="0" units="1/dev"/>
+        </inkml:channelProperties>
+      </inkml:inkSource>
+      <inkml:timestamp xml:id="ts0" timeString="2026-10-26T16:47:54.219"/>
+    </inkml:context>
+    <inkml:brush xml:id="br0">
+      <inkml:brushProperty name="width" value="0.035" units="cm"/>
+      <inkml:brushProperty name="height" value="0.035" units="cm"/>
+    </inkml:brush>
+  </inkml:definitions>
+  <inkml:trace contextRef="#ctx0" brushRef="#br0">1237 222 24575,'-62'-3'0,"0"-4"0,1-2 0,-69-19 0,11 2 0,-22-1 0,-275-61 0,386 79-227,-1 2-1,-1 1 1,1 1-1,-1 1 1,-48 2-1,71 3-6598</inkml:trace>
+</inkml:ink>
+</file>
+
+<file path=ppt/ink/ink7.xml><?xml version="1.0" encoding="utf-8"?>
+<inkml:ink xmlns:inkml="http://www.w3.org/2003/InkML">
+  <inkml:definitions>
+    <inkml:context xml:id="ctx0">
+      <inkml:inkSource xml:id="inkSrc0">
+        <inkml:traceFormat>
+          <inkml:channel name="X" type="integer" min="-2.14748E9" max="2.14748E9" units="cm"/>
+          <inkml:channel name="Y" type="integer" min="-2.14748E9" max="2.14748E9" units="cm"/>
+          <inkml:channel name="F" type="integer" max="32767" units="dev"/>
+        </inkml:traceFormat>
+        <inkml:channelProperties>
+          <inkml:channelProperty channel="X" name="resolution" value="1000" units="1/cm"/>
+          <inkml:channelProperty channel="Y" name="resolution" value="1000" units="1/cm"/>
+          <inkml:channelProperty channel="F" name="resolution" value="0" units="1/dev"/>
+        </inkml:channelProperties>
+      </inkml:inkSource>
+      <inkml:timestamp xml:id="ts0" timeString="2026-10-26T16:47:55.181"/>
+    </inkml:context>
+    <inkml:brush xml:id="br0">
+      <inkml:brushProperty name="width" value="0.035" units="cm"/>
+      <inkml:brushProperty name="height" value="0.035" units="cm"/>
+    </inkml:brush>
+  </inkml:definitions>
+  <inkml:trace contextRef="#ctx0" brushRef="#br0">440 0 24575,'-32'36'0,"2"1"0,-40 65 0,40-58 0,-35 62-455,4 4 0,-86 217 0,143-316-6371</inkml:trace>
+</inkml:ink>
+</file>
+
+<file path=ppt/ink/ink8.xml><?xml version="1.0" encoding="utf-8"?>
+<inkml:ink xmlns:inkml="http://www.w3.org/2003/InkML">
+  <inkml:definitions>
+    <inkml:context xml:id="ctx0">
+      <inkml:inkSource xml:id="inkSrc0">
+        <inkml:traceFormat>
+          <inkml:channel name="X" type="integer" min="-2.14748E9" max="2.14748E9" units="cm"/>
+          <inkml:channel name="Y" type="integer" min="-2.14748E9" max="2.14748E9" units="cm"/>
+          <inkml:channel name="F" type="integer" max="32767" units="dev"/>
+        </inkml:traceFormat>
+        <inkml:channelProperties>
+          <inkml:channelProperty channel="X" name="resolution" value="1000" units="1/cm"/>
+          <inkml:channelProperty channel="Y" name="resolution" value="1000" units="1/cm"/>
+          <inkml:channelProperty channel="F" name="resolution" value="0" units="1/dev"/>
+        </inkml:channelProperties>
+      </inkml:inkSource>
       <inkml:timestamp xml:id="ts0" timeString="2026-10-07T16:54:35.046"/>
     </inkml:context>
     <inkml:brush xml:id="br0">
@@ -245,6 +434,33 @@
     </inkml:brush>
   </inkml:definitions>
   <inkml:trace contextRef="#ctx0" brushRef="#br0">0 2151 24575,'7'-7'0,"-2"0"0,1 0 0,-1-1 0,8-16 0,9-14 0,273-345 36,32 22-786,759-669 1321,-1042 992-485,114-90-20,-126 105-68,1 1-1,1 2 1,42-18 0,-67 35-225,0 0-1,0 0 1,0 1-1,1 0 1,9 0-1,3 0-6598</inkml:trace>
+</inkml:ink>
+</file>
+
+<file path=ppt/ink/ink9.xml><?xml version="1.0" encoding="utf-8"?>
+<inkml:ink xmlns:inkml="http://www.w3.org/2003/InkML">
+  <inkml:definitions>
+    <inkml:context xml:id="ctx0">
+      <inkml:inkSource xml:id="inkSrc0">
+        <inkml:traceFormat>
+          <inkml:channel name="X" type="integer" min="-2.14748E9" max="2.14748E9" units="cm"/>
+          <inkml:channel name="Y" type="integer" min="-2.14748E9" max="2.14748E9" units="cm"/>
+          <inkml:channel name="F" type="integer" max="32767" units="dev"/>
+        </inkml:traceFormat>
+        <inkml:channelProperties>
+          <inkml:channelProperty channel="X" name="resolution" value="1000" units="1/cm"/>
+          <inkml:channelProperty channel="Y" name="resolution" value="1000" units="1/cm"/>
+          <inkml:channelProperty channel="F" name="resolution" value="0" units="1/dev"/>
+        </inkml:channelProperties>
+      </inkml:inkSource>
+      <inkml:timestamp xml:id="ts0" timeString="2026-10-26T16:36:13.932"/>
+    </inkml:context>
+    <inkml:brush xml:id="br0">
+      <inkml:brushProperty name="width" value="0.035" units="cm"/>
+      <inkml:brushProperty name="height" value="0.035" units="cm"/>
+    </inkml:brush>
+  </inkml:definitions>
+  <inkml:trace contextRef="#ctx0" brushRef="#br0">0 0 24575,'352'311'-132,"-271"-243"-237,237 196-2134,425 362 3378,-644-544-501,123 109 1359,-189-160-2181,-2 1 1,36 46-1,-55-61-6378</inkml:trace>
 </inkml:ink>
 </file>
 
@@ -395,7 +611,7 @@
           <a:p>
             <a:fld id="{21B4F6BF-5F93-4EF7-AA5E-8F88AAC0241C}" type="datetimeFigureOut">
               <a:rPr lang="en-US" smtClean="0"/>
-              <a:t>10/7/2026</a:t>
+              <a:t>10/26/2026</a:t>
             </a:fld>
             <a:endParaRPr lang="en-US"/>
           </a:p>
@@ -593,7 +809,7 @@
           <a:p>
             <a:fld id="{21B4F6BF-5F93-4EF7-AA5E-8F88AAC0241C}" type="datetimeFigureOut">
               <a:rPr lang="en-US" smtClean="0"/>
-              <a:t>10/7/2026</a:t>
+              <a:t>10/26/2026</a:t>
             </a:fld>
             <a:endParaRPr lang="en-US"/>
           </a:p>
@@ -801,7 +1017,7 @@
           <a:p>
             <a:fld id="{21B4F6BF-5F93-4EF7-AA5E-8F88AAC0241C}" type="datetimeFigureOut">
               <a:rPr lang="en-US" smtClean="0"/>
-              <a:t>10/7/2026</a:t>
+              <a:t>10/26/2026</a:t>
             </a:fld>
             <a:endParaRPr lang="en-US"/>
           </a:p>
@@ -999,7 +1215,7 @@
           <a:p>
             <a:fld id="{21B4F6BF-5F93-4EF7-AA5E-8F88AAC0241C}" type="datetimeFigureOut">
               <a:rPr lang="en-US" smtClean="0"/>
-              <a:t>10/7/2026</a:t>
+              <a:t>10/26/2026</a:t>
             </a:fld>
             <a:endParaRPr lang="en-US"/>
           </a:p>
@@ -1274,7 +1490,7 @@
           <a:p>
             <a:fld id="{21B4F6BF-5F93-4EF7-AA5E-8F88AAC0241C}" type="datetimeFigureOut">
               <a:rPr lang="en-US" smtClean="0"/>
-              <a:t>10/7/2026</a:t>
+              <a:t>10/26/2026</a:t>
             </a:fld>
             <a:endParaRPr lang="en-US"/>
           </a:p>
@@ -1539,7 +1755,7 @@
           <a:p>
             <a:fld id="{21B4F6BF-5F93-4EF7-AA5E-8F88AAC0241C}" type="datetimeFigureOut">
               <a:rPr lang="en-US" smtClean="0"/>
-              <a:t>10/7/2026</a:t>
+              <a:t>10/26/2026</a:t>
             </a:fld>
             <a:endParaRPr lang="en-US"/>
           </a:p>
@@ -1951,7 +2167,7 @@
           <a:p>
             <a:fld id="{21B4F6BF-5F93-4EF7-AA5E-8F88AAC0241C}" type="datetimeFigureOut">
               <a:rPr lang="en-US" smtClean="0"/>
-              <a:t>10/7/2026</a:t>
+              <a:t>10/26/2026</a:t>
             </a:fld>
             <a:endParaRPr lang="en-US"/>
           </a:p>
@@ -2092,7 +2308,7 @@
           <a:p>
             <a:fld id="{21B4F6BF-5F93-4EF7-AA5E-8F88AAC0241C}" type="datetimeFigureOut">
               <a:rPr lang="en-US" smtClean="0"/>
-              <a:t>10/7/2026</a:t>
+              <a:t>10/26/2026</a:t>
             </a:fld>
             <a:endParaRPr lang="en-US"/>
           </a:p>
@@ -2205,7 +2421,7 @@
           <a:p>
             <a:fld id="{21B4F6BF-5F93-4EF7-AA5E-8F88AAC0241C}" type="datetimeFigureOut">
               <a:rPr lang="en-US" smtClean="0"/>
-              <a:t>10/7/2026</a:t>
+              <a:t>10/26/2026</a:t>
             </a:fld>
             <a:endParaRPr lang="en-US"/>
           </a:p>
@@ -2516,7 +2732,7 @@
           <a:p>
             <a:fld id="{21B4F6BF-5F93-4EF7-AA5E-8F88AAC0241C}" type="datetimeFigureOut">
               <a:rPr lang="en-US" smtClean="0"/>
-              <a:t>10/7/2026</a:t>
+              <a:t>10/26/2026</a:t>
             </a:fld>
             <a:endParaRPr lang="en-US"/>
           </a:p>
@@ -2804,7 +3020,7 @@
           <a:p>
             <a:fld id="{21B4F6BF-5F93-4EF7-AA5E-8F88AAC0241C}" type="datetimeFigureOut">
               <a:rPr lang="en-US" smtClean="0"/>
-              <a:t>10/7/2026</a:t>
+              <a:t>10/26/2026</a:t>
             </a:fld>
             <a:endParaRPr lang="en-US"/>
           </a:p>
@@ -3045,7 +3261,7 @@
           <a:p>
             <a:fld id="{21B4F6BF-5F93-4EF7-AA5E-8F88AAC0241C}" type="datetimeFigureOut">
               <a:rPr lang="en-US" smtClean="0"/>
-              <a:t>10/7/2026</a:t>
+              <a:t>10/26/2026</a:t>
             </a:fld>
             <a:endParaRPr lang="en-US"/>
           </a:p>
@@ -3795,6 +4011,195 @@
           </p:pic>
         </mc:Fallback>
       </mc:AlternateContent>
+      <mc:AlternateContent xmlns:mc="http://schemas.openxmlformats.org/markup-compatibility/2006">
+        <mc:Choice xmlns:p14="http://schemas.microsoft.com/office/powerpoint/2010/main" Requires="p14">
+          <p:contentPart p14:bwMode="auto" r:id="rId13">
+            <p14:nvContentPartPr>
+              <p14:cNvPr id="4" name="Ink 3">
+                <a:extLst>
+                  <a:ext uri="{FF2B5EF4-FFF2-40B4-BE49-F238E27FC236}">
+                    <a16:creationId xmlns:a16="http://schemas.microsoft.com/office/drawing/2014/main" id="{DB58AB42-C30F-9CDB-BA1A-42AD9D1AB382}"/>
+                  </a:ext>
+                </a:extLst>
+              </p14:cNvPr>
+              <p14:cNvContentPartPr/>
+              <p14:nvPr/>
+            </p14:nvContentPartPr>
+            <p14:xfrm>
+              <a:off x="4965097" y="854532"/>
+              <a:ext cx="933480" cy="295920"/>
+            </p14:xfrm>
+          </p:contentPart>
+        </mc:Choice>
+        <mc:Fallback>
+          <p:pic>
+            <p:nvPicPr>
+              <p:cNvPr id="4" name="Ink 3">
+                <a:extLst>
+                  <a:ext uri="{FF2B5EF4-FFF2-40B4-BE49-F238E27FC236}">
+                    <a16:creationId xmlns:a16="http://schemas.microsoft.com/office/drawing/2014/main" id="{DB58AB42-C30F-9CDB-BA1A-42AD9D1AB382}"/>
+                  </a:ext>
+                </a:extLst>
+              </p:cNvPr>
+              <p:cNvPicPr/>
+              <p:nvPr/>
+            </p:nvPicPr>
+            <p:blipFill>
+              <a:blip r:embed="rId14"/>
+              <a:stretch>
+                <a:fillRect/>
+              </a:stretch>
+            </p:blipFill>
+            <p:spPr>
+              <a:xfrm>
+                <a:off x="4958977" y="848412"/>
+                <a:ext cx="945720" cy="308160"/>
+              </a:xfrm>
+              <a:prstGeom prst="rect">
+                <a:avLst/>
+              </a:prstGeom>
+            </p:spPr>
+          </p:pic>
+        </mc:Fallback>
+      </mc:AlternateContent>
+      <mc:AlternateContent xmlns:mc="http://schemas.openxmlformats.org/markup-compatibility/2006">
+        <mc:Choice xmlns:p14="http://schemas.microsoft.com/office/powerpoint/2010/main" Requires="p14">
+          <p:contentPart p14:bwMode="auto" r:id="rId15">
+            <p14:nvContentPartPr>
+              <p14:cNvPr id="6" name="Ink 5">
+                <a:extLst>
+                  <a:ext uri="{FF2B5EF4-FFF2-40B4-BE49-F238E27FC236}">
+                    <a16:creationId xmlns:a16="http://schemas.microsoft.com/office/drawing/2014/main" id="{4A4755AD-B2AD-D624-CFAA-527C11106D21}"/>
+                  </a:ext>
+                </a:extLst>
+              </p14:cNvPr>
+              <p14:cNvContentPartPr/>
+              <p14:nvPr/>
+            </p14:nvContentPartPr>
+            <p14:xfrm>
+              <a:off x="5405017" y="745812"/>
+              <a:ext cx="445320" cy="80280"/>
+            </p14:xfrm>
+          </p:contentPart>
+        </mc:Choice>
+        <mc:Fallback>
+          <p:pic>
+            <p:nvPicPr>
+              <p:cNvPr id="6" name="Ink 5">
+                <a:extLst>
+                  <a:ext uri="{FF2B5EF4-FFF2-40B4-BE49-F238E27FC236}">
+                    <a16:creationId xmlns:a16="http://schemas.microsoft.com/office/drawing/2014/main" id="{4A4755AD-B2AD-D624-CFAA-527C11106D21}"/>
+                  </a:ext>
+                </a:extLst>
+              </p:cNvPr>
+              <p:cNvPicPr/>
+              <p:nvPr/>
+            </p:nvPicPr>
+            <p:blipFill>
+              <a:blip r:embed="rId16"/>
+              <a:stretch>
+                <a:fillRect/>
+              </a:stretch>
+            </p:blipFill>
+            <p:spPr>
+              <a:xfrm>
+                <a:off x="5398897" y="739692"/>
+                <a:ext cx="457560" cy="92520"/>
+              </a:xfrm>
+              <a:prstGeom prst="rect">
+                <a:avLst/>
+              </a:prstGeom>
+            </p:spPr>
+          </p:pic>
+        </mc:Fallback>
+      </mc:AlternateContent>
+      <mc:AlternateContent xmlns:mc="http://schemas.openxmlformats.org/markup-compatibility/2006">
+        <mc:Choice xmlns:p14="http://schemas.microsoft.com/office/powerpoint/2010/main" Requires="p14">
+          <p:contentPart p14:bwMode="auto" r:id="rId17">
+            <p14:nvContentPartPr>
+              <p14:cNvPr id="8" name="Ink 7">
+                <a:extLst>
+                  <a:ext uri="{FF2B5EF4-FFF2-40B4-BE49-F238E27FC236}">
+                    <a16:creationId xmlns:a16="http://schemas.microsoft.com/office/drawing/2014/main" id="{C32923E6-BFBA-8257-92F7-F50024D1563D}"/>
+                  </a:ext>
+                </a:extLst>
+              </p14:cNvPr>
+              <p14:cNvContentPartPr/>
+              <p14:nvPr/>
+            </p14:nvContentPartPr>
+            <p14:xfrm>
+              <a:off x="5731177" y="973332"/>
+              <a:ext cx="158400" cy="278640"/>
+            </p14:xfrm>
+          </p:contentPart>
+        </mc:Choice>
+        <mc:Fallback>
+          <p:pic>
+            <p:nvPicPr>
+              <p:cNvPr id="8" name="Ink 7">
+                <a:extLst>
+                  <a:ext uri="{FF2B5EF4-FFF2-40B4-BE49-F238E27FC236}">
+                    <a16:creationId xmlns:a16="http://schemas.microsoft.com/office/drawing/2014/main" id="{C32923E6-BFBA-8257-92F7-F50024D1563D}"/>
+                  </a:ext>
+                </a:extLst>
+              </p:cNvPr>
+              <p:cNvPicPr/>
+              <p:nvPr/>
+            </p:nvPicPr>
+            <p:blipFill>
+              <a:blip r:embed="rId18"/>
+              <a:stretch>
+                <a:fillRect/>
+              </a:stretch>
+            </p:blipFill>
+            <p:spPr>
+              <a:xfrm>
+                <a:off x="5725057" y="967212"/>
+                <a:ext cx="170640" cy="290880"/>
+              </a:xfrm>
+              <a:prstGeom prst="rect">
+                <a:avLst/>
+              </a:prstGeom>
+            </p:spPr>
+          </p:pic>
+        </mc:Fallback>
+      </mc:AlternateContent>
+      <p:pic>
+        <p:nvPicPr>
+          <p:cNvPr id="19" name="Picture 18">
+            <a:extLst>
+              <a:ext uri="{FF2B5EF4-FFF2-40B4-BE49-F238E27FC236}">
+                <a16:creationId xmlns:a16="http://schemas.microsoft.com/office/drawing/2014/main" id="{E3CED563-DA25-A5C8-7F03-6CE83D60FA91}"/>
+              </a:ext>
+            </a:extLst>
+          </p:cNvPr>
+          <p:cNvPicPr>
+            <a:picLocks noChangeAspect="1"/>
+          </p:cNvPicPr>
+          <p:nvPr/>
+        </p:nvPicPr>
+        <p:blipFill>
+          <a:blip r:embed="rId19">
+            <a:extLst>
+              <a:ext uri="{28A0092B-C50C-407E-A947-70E740481C1C}">
+                <a14:useLocalDpi xmlns:a14="http://schemas.microsoft.com/office/drawing/2010/main" val="0"/>
+              </a:ext>
+            </a:extLst>
+          </a:blip>
+          <a:stretch>
+            <a:fillRect/>
+          </a:stretch>
+        </p:blipFill>
+        <p:spPr>
+          <a:xfrm>
+            <a:off x="6050649" y="-477263"/>
+            <a:ext cx="2959510" cy="2959510"/>
+          </a:xfrm>
+          <a:prstGeom prst="rect">
+            <a:avLst/>
+          </a:prstGeom>
+        </p:spPr>
+      </p:pic>
     </p:spTree>
     <p:extLst>
       <p:ext uri="{BB962C8B-B14F-4D97-AF65-F5344CB8AC3E}">
@@ -3940,6 +4345,297 @@
               <a:xfrm>
                 <a:off x="1752171" y="2073185"/>
                 <a:ext cx="815040" cy="786960"/>
+              </a:xfrm>
+              <a:prstGeom prst="rect">
+                <a:avLst/>
+              </a:prstGeom>
+            </p:spPr>
+          </p:pic>
+        </mc:Fallback>
+      </mc:AlternateContent>
+      <p:pic>
+        <p:nvPicPr>
+          <p:cNvPr id="4" name="Picture 3">
+            <a:extLst>
+              <a:ext uri="{FF2B5EF4-FFF2-40B4-BE49-F238E27FC236}">
+                <a16:creationId xmlns:a16="http://schemas.microsoft.com/office/drawing/2014/main" id="{16242A10-2F12-9E08-92E5-FF9F5C666FEA}"/>
+              </a:ext>
+            </a:extLst>
+          </p:cNvPr>
+          <p:cNvPicPr>
+            <a:picLocks noChangeAspect="1"/>
+          </p:cNvPicPr>
+          <p:nvPr/>
+        </p:nvPicPr>
+        <p:blipFill>
+          <a:blip r:embed="rId6">
+            <a:extLst>
+              <a:ext uri="{28A0092B-C50C-407E-A947-70E740481C1C}">
+                <a14:useLocalDpi xmlns:a14="http://schemas.microsoft.com/office/drawing/2010/main" val="0"/>
+              </a:ext>
+            </a:extLst>
+          </a:blip>
+          <a:stretch>
+            <a:fillRect/>
+          </a:stretch>
+        </p:blipFill>
+        <p:spPr>
+          <a:xfrm>
+            <a:off x="2588706" y="3529781"/>
+            <a:ext cx="2819399" cy="2819399"/>
+          </a:xfrm>
+          <a:prstGeom prst="rect">
+            <a:avLst/>
+          </a:prstGeom>
+        </p:spPr>
+      </p:pic>
+      <mc:AlternateContent xmlns:mc="http://schemas.openxmlformats.org/markup-compatibility/2006">
+        <mc:Choice xmlns:p14="http://schemas.microsoft.com/office/powerpoint/2010/main" Requires="p14">
+          <p:contentPart p14:bwMode="auto" r:id="rId7">
+            <p14:nvContentPartPr>
+              <p14:cNvPr id="7" name="Ink 6">
+                <a:extLst>
+                  <a:ext uri="{FF2B5EF4-FFF2-40B4-BE49-F238E27FC236}">
+                    <a16:creationId xmlns:a16="http://schemas.microsoft.com/office/drawing/2014/main" id="{52D77826-8072-342C-FACB-08B2FE0A7A10}"/>
+                  </a:ext>
+                </a:extLst>
+              </p14:cNvPr>
+              <p14:cNvContentPartPr/>
+              <p14:nvPr/>
+            </p14:nvContentPartPr>
+            <p14:xfrm>
+              <a:off x="1514137" y="3972108"/>
+              <a:ext cx="705240" cy="612360"/>
+            </p14:xfrm>
+          </p:contentPart>
+        </mc:Choice>
+        <mc:Fallback>
+          <p:pic>
+            <p:nvPicPr>
+              <p:cNvPr id="7" name="Ink 6">
+                <a:extLst>
+                  <a:ext uri="{FF2B5EF4-FFF2-40B4-BE49-F238E27FC236}">
+                    <a16:creationId xmlns:a16="http://schemas.microsoft.com/office/drawing/2014/main" id="{52D77826-8072-342C-FACB-08B2FE0A7A10}"/>
+                  </a:ext>
+                </a:extLst>
+              </p:cNvPr>
+              <p:cNvPicPr/>
+              <p:nvPr/>
+            </p:nvPicPr>
+            <p:blipFill>
+              <a:blip r:embed="rId8"/>
+              <a:stretch>
+                <a:fillRect/>
+              </a:stretch>
+            </p:blipFill>
+            <p:spPr>
+              <a:xfrm>
+                <a:off x="1508017" y="3965988"/>
+                <a:ext cx="717480" cy="624600"/>
+              </a:xfrm>
+              <a:prstGeom prst="rect">
+                <a:avLst/>
+              </a:prstGeom>
+            </p:spPr>
+          </p:pic>
+        </mc:Fallback>
+      </mc:AlternateContent>
+      <mc:AlternateContent xmlns:mc="http://schemas.openxmlformats.org/markup-compatibility/2006">
+        <mc:Choice xmlns:p14="http://schemas.microsoft.com/office/powerpoint/2010/main" Requires="p14">
+          <p:contentPart p14:bwMode="auto" r:id="rId9">
+            <p14:nvContentPartPr>
+              <p14:cNvPr id="8" name="Ink 7">
+                <a:extLst>
+                  <a:ext uri="{FF2B5EF4-FFF2-40B4-BE49-F238E27FC236}">
+                    <a16:creationId xmlns:a16="http://schemas.microsoft.com/office/drawing/2014/main" id="{0C8AC2F5-10CC-3950-4068-6F6D2B564D34}"/>
+                  </a:ext>
+                </a:extLst>
+              </p14:cNvPr>
+              <p14:cNvContentPartPr/>
+              <p14:nvPr/>
+            </p14:nvContentPartPr>
+            <p14:xfrm>
+              <a:off x="2251417" y="1956468"/>
+              <a:ext cx="296280" cy="40320"/>
+            </p14:xfrm>
+          </p:contentPart>
+        </mc:Choice>
+        <mc:Fallback>
+          <p:pic>
+            <p:nvPicPr>
+              <p:cNvPr id="8" name="Ink 7">
+                <a:extLst>
+                  <a:ext uri="{FF2B5EF4-FFF2-40B4-BE49-F238E27FC236}">
+                    <a16:creationId xmlns:a16="http://schemas.microsoft.com/office/drawing/2014/main" id="{0C8AC2F5-10CC-3950-4068-6F6D2B564D34}"/>
+                  </a:ext>
+                </a:extLst>
+              </p:cNvPr>
+              <p:cNvPicPr/>
+              <p:nvPr/>
+            </p:nvPicPr>
+            <p:blipFill>
+              <a:blip r:embed="rId10"/>
+              <a:stretch>
+                <a:fillRect/>
+              </a:stretch>
+            </p:blipFill>
+            <p:spPr>
+              <a:xfrm>
+                <a:off x="2245297" y="1950348"/>
+                <a:ext cx="308520" cy="52560"/>
+              </a:xfrm>
+              <a:prstGeom prst="rect">
+                <a:avLst/>
+              </a:prstGeom>
+            </p:spPr>
+          </p:pic>
+        </mc:Fallback>
+      </mc:AlternateContent>
+      <mc:AlternateContent xmlns:mc="http://schemas.openxmlformats.org/markup-compatibility/2006">
+        <mc:Choice xmlns:p14="http://schemas.microsoft.com/office/powerpoint/2010/main" Requires="p14">
+          <p:contentPart p14:bwMode="auto" r:id="rId11">
+            <p14:nvContentPartPr>
+              <p14:cNvPr id="9" name="Ink 8">
+                <a:extLst>
+                  <a:ext uri="{FF2B5EF4-FFF2-40B4-BE49-F238E27FC236}">
+                    <a16:creationId xmlns:a16="http://schemas.microsoft.com/office/drawing/2014/main" id="{7433F24E-01F8-78B0-E4E7-37C564812313}"/>
+                  </a:ext>
+                </a:extLst>
+              </p14:cNvPr>
+              <p14:cNvContentPartPr/>
+              <p14:nvPr/>
+            </p14:nvContentPartPr>
+            <p14:xfrm>
+              <a:off x="2528617" y="2290908"/>
+              <a:ext cx="96840" cy="308160"/>
+            </p14:xfrm>
+          </p:contentPart>
+        </mc:Choice>
+        <mc:Fallback>
+          <p:pic>
+            <p:nvPicPr>
+              <p:cNvPr id="9" name="Ink 8">
+                <a:extLst>
+                  <a:ext uri="{FF2B5EF4-FFF2-40B4-BE49-F238E27FC236}">
+                    <a16:creationId xmlns:a16="http://schemas.microsoft.com/office/drawing/2014/main" id="{7433F24E-01F8-78B0-E4E7-37C564812313}"/>
+                  </a:ext>
+                </a:extLst>
+              </p:cNvPr>
+              <p:cNvPicPr/>
+              <p:nvPr/>
+            </p:nvPicPr>
+            <p:blipFill>
+              <a:blip r:embed="rId12"/>
+              <a:stretch>
+                <a:fillRect/>
+              </a:stretch>
+            </p:blipFill>
+            <p:spPr>
+              <a:xfrm>
+                <a:off x="2522497" y="2284788"/>
+                <a:ext cx="109080" cy="320400"/>
+              </a:xfrm>
+              <a:prstGeom prst="rect">
+                <a:avLst/>
+              </a:prstGeom>
+            </p:spPr>
+          </p:pic>
+        </mc:Fallback>
+      </mc:AlternateContent>
+      <mc:AlternateContent xmlns:mc="http://schemas.openxmlformats.org/markup-compatibility/2006">
+        <mc:Choice xmlns:p14="http://schemas.microsoft.com/office/powerpoint/2010/main" Requires="p14">
+          <p:contentPart p14:bwMode="auto" r:id="rId13">
+            <p14:nvContentPartPr>
+              <p14:cNvPr id="10" name="Ink 9">
+                <a:extLst>
+                  <a:ext uri="{FF2B5EF4-FFF2-40B4-BE49-F238E27FC236}">
+                    <a16:creationId xmlns:a16="http://schemas.microsoft.com/office/drawing/2014/main" id="{A5556526-A4C5-BCC7-A93B-3C56685A1515}"/>
+                  </a:ext>
+                </a:extLst>
+              </p14:cNvPr>
+              <p14:cNvContentPartPr/>
+              <p14:nvPr/>
+            </p14:nvContentPartPr>
+            <p14:xfrm>
+              <a:off x="2251417" y="4049148"/>
+              <a:ext cx="360" cy="365760"/>
+            </p14:xfrm>
+          </p:contentPart>
+        </mc:Choice>
+        <mc:Fallback>
+          <p:pic>
+            <p:nvPicPr>
+              <p:cNvPr id="10" name="Ink 9">
+                <a:extLst>
+                  <a:ext uri="{FF2B5EF4-FFF2-40B4-BE49-F238E27FC236}">
+                    <a16:creationId xmlns:a16="http://schemas.microsoft.com/office/drawing/2014/main" id="{A5556526-A4C5-BCC7-A93B-3C56685A1515}"/>
+                  </a:ext>
+                </a:extLst>
+              </p:cNvPr>
+              <p:cNvPicPr/>
+              <p:nvPr/>
+            </p:nvPicPr>
+            <p:blipFill>
+              <a:blip r:embed="rId14"/>
+              <a:stretch>
+                <a:fillRect/>
+              </a:stretch>
+            </p:blipFill>
+            <p:spPr>
+              <a:xfrm>
+                <a:off x="2245297" y="4043028"/>
+                <a:ext cx="12600" cy="378000"/>
+              </a:xfrm>
+              <a:prstGeom prst="rect">
+                <a:avLst/>
+              </a:prstGeom>
+            </p:spPr>
+          </p:pic>
+        </mc:Fallback>
+      </mc:AlternateContent>
+      <mc:AlternateContent xmlns:mc="http://schemas.openxmlformats.org/markup-compatibility/2006">
+        <mc:Choice xmlns:p14="http://schemas.microsoft.com/office/powerpoint/2010/main" Requires="p14">
+          <p:contentPart p14:bwMode="auto" r:id="rId15">
+            <p14:nvContentPartPr>
+              <p14:cNvPr id="11" name="Ink 10">
+                <a:extLst>
+                  <a:ext uri="{FF2B5EF4-FFF2-40B4-BE49-F238E27FC236}">
+                    <a16:creationId xmlns:a16="http://schemas.microsoft.com/office/drawing/2014/main" id="{87C58895-680E-D863-2FE5-7211AA77006E}"/>
+                  </a:ext>
+                </a:extLst>
+              </p14:cNvPr>
+              <p14:cNvContentPartPr/>
+              <p14:nvPr/>
+            </p14:nvContentPartPr>
+            <p14:xfrm>
+              <a:off x="1382017" y="4729188"/>
+              <a:ext cx="712440" cy="10800"/>
+            </p14:xfrm>
+          </p:contentPart>
+        </mc:Choice>
+        <mc:Fallback>
+          <p:pic>
+            <p:nvPicPr>
+              <p:cNvPr id="11" name="Ink 10">
+                <a:extLst>
+                  <a:ext uri="{FF2B5EF4-FFF2-40B4-BE49-F238E27FC236}">
+                    <a16:creationId xmlns:a16="http://schemas.microsoft.com/office/drawing/2014/main" id="{87C58895-680E-D863-2FE5-7211AA77006E}"/>
+                  </a:ext>
+                </a:extLst>
+              </p:cNvPr>
+              <p:cNvPicPr/>
+              <p:nvPr/>
+            </p:nvPicPr>
+            <p:blipFill>
+              <a:blip r:embed="rId16"/>
+              <a:stretch>
+                <a:fillRect/>
+              </a:stretch>
+            </p:blipFill>
+            <p:spPr>
+              <a:xfrm>
+                <a:off x="1375897" y="4723068"/>
+                <a:ext cx="724680" cy="23040"/>
               </a:xfrm>
               <a:prstGeom prst="rect">
                 <a:avLst/>
